--- a/Week10/Week10_Data_Export_Reports.pptx
+++ b/Week10/Week10_Data_Export_Reports.pptx
@@ -3256,7 +3256,7 @@
                   <a:srgbClr val="FFFFFF"/>
                 </a:solidFill>
               </a:rPr>
-              <a:t>Data Export</a:t>
+              <a:t>នាំចេញទិន្នន័យ</a:t>
             </a:r>
           </a:p>
         </p:txBody>
@@ -3290,7 +3290,7 @@
                   <a:srgbClr val="F39620"/>
                 </a:solidFill>
               </a:rPr>
-              <a:t>&amp; Reports</a:t>
+              <a:t>&amp; របាយការណ៍</a:t>
             </a:r>
           </a:p>
         </p:txBody>
@@ -3324,7 +3324,7 @@
                   <a:srgbClr val="AAAABB"/>
                 </a:solidFill>
               </a:rPr>
-              <a:t>SmartFarmerAssistant — Generating &amp; Sharing Reports for Farmers</a:t>
+              <a:t>SmartFarmerAssistant — បង្កើត &amp; ចែករំលែក របាយការណ៍ សម្រាប់កសិករ</a:t>
             </a:r>
           </a:p>
         </p:txBody>
@@ -3990,7 +3990,7 @@
                   <a:srgbClr val="AAAABB"/>
                 </a:solidFill>
               </a:rPr>
-              <a:t>Farmer UX</a:t>
+              <a:t>UX កសិករ</a:t>
             </a:r>
           </a:p>
         </p:txBody>
@@ -4700,7 +4700,7 @@
                   <a:srgbClr val="FFFFFF"/>
                 </a:solidFill>
               </a:rPr>
-              <a:t>Key Design Choices</a:t>
+              <a:t>ការសម្រេចចិត្ត Design</a:t>
             </a:r>
           </a:p>
         </p:txBody>
@@ -4820,7 +4820,7 @@
                   <a:srgbClr val="1BB889"/>
                 </a:solidFill>
               </a:rPr>
-              <a:t>Month start not Date()</a:t>
+              <a:t>Month start ជំនួស Date()</a:t>
             </a:r>
           </a:p>
         </p:txBody>
@@ -4854,7 +4854,7 @@
                   <a:srgbClr val="AAAABB"/>
                 </a:solidFill>
               </a:rPr>
-              <a:t>dateInterval(of:for:).start avoids off-by-one near midnight / month boundary</a:t>
+              <a:t>dateInterval(of:for:).start ការពារ off-by-one ជិត midnight</a:t>
             </a:r>
           </a:p>
         </p:txBody>
@@ -4974,7 +4974,7 @@
                   <a:srgbClr val="F39620"/>
                 </a:solidFill>
               </a:rPr>
-              <a:t>$0.isExpense not !$0.isIncome</a:t>
+              <a:t>$0.isExpense ជំនួស !$0.isIncome</a:t>
             </a:r>
           </a:p>
         </p:txBody>
@@ -5008,7 +5008,7 @@
                   <a:srgbClr val="AAAABB"/>
                 </a:solidFill>
               </a:rPr>
-              <a:t>Transaction has both computed properties — explicit is clearer and safer</a:t>
+              <a:t>Transaction មាន computed properties ពីរ — explicit ច្បាស់ &amp; safe ជាង</a:t>
             </a:r>
           </a:p>
         </p:txBody>
@@ -5128,7 +5128,7 @@
                   <a:srgbClr val="287DFA"/>
                 </a:solidFill>
               </a:rPr>
-              <a:t>selectedReport returns zero report</a:t>
+              <a:t>selectedReport return zero report</a:t>
             </a:r>
           </a:p>
         </p:txBody>
@@ -5162,7 +5162,7 @@
                   <a:srgbClr val="AAAABB"/>
                 </a:solidFill>
               </a:rPr>
-              <a:t>Chart &amp; summary never crash on an empty month — $0.00 displays gracefully</a:t>
+              <a:t>Chart &amp; summary មិន crash ខែទទេ — $0.00 បង្ហាញ</a:t>
             </a:r>
           </a:p>
         </p:txBody>
@@ -5316,7 +5316,7 @@
                   <a:srgbClr val="AAAABB"/>
                 </a:solidFill>
               </a:rPr>
-              <a:t>Prevents navigating into the future where no data will ever exist</a:t>
+              <a:t>ការពារ navigate ទៅខែអនាគតដែលគ្មានទិន្នន័យ</a:t>
             </a:r>
           </a:p>
         </p:txBody>
@@ -5453,7 +5453,7 @@
                   <a:srgbClr val="FFD700"/>
                 </a:solidFill>
               </a:rPr>
-              <a:t>⚠️  iOS API Rules — Week 10 Quick Reference</a:t>
+              <a:t>⚠️  ច្បាប់ iOS API — Week 10 Quick Reference</a:t>
             </a:r>
           </a:p>
         </p:txBody>
@@ -5564,7 +5564,7 @@
                   <a:srgbClr val="00C9C8"/>
                 </a:solidFill>
               </a:rPr>
-              <a:t>❌ Wrong (newer API)</a:t>
+              <a:t>❌ ខុស (API ថ្មីជាង)</a:t>
             </a:r>
           </a:p>
         </p:txBody>
@@ -5598,7 +5598,7 @@
                   <a:srgbClr val="00C9C8"/>
                 </a:solidFill>
               </a:rPr>
-              <a:t>✅ Correct (iOS 13+)</a:t>
+              <a:t>✅ ត្រឹមត្រូវ (iOS 13+)</a:t>
             </a:r>
           </a:p>
         </p:txBody>
@@ -5709,7 +5709,7 @@
                   <a:srgbClr val="E54747"/>
                 </a:solidFill>
               </a:rPr>
-              <a:t>Swift Charts (iOS 16+)</a:t>
+              <a:t>Swift Charts (iOS 16+ — ខុស)</a:t>
             </a:r>
           </a:p>
         </p:txBody>
@@ -5854,7 +5854,7 @@
                   <a:srgbClr val="E54747"/>
                 </a:solidFill>
               </a:rPr>
-              <a:t>dateComponents(_:from:to:) careless</a:t>
+              <a:t>dateComponents careless</a:t>
             </a:r>
           </a:p>
         </p:txBody>
@@ -5999,7 +5999,7 @@
                   <a:srgbClr val="E54747"/>
                 </a:solidFill>
               </a:rPr>
-              <a:t>ShareLink (iOS 16+)</a:t>
+              <a:t>ShareLink (iOS 16+ — ខុស)</a:t>
             </a:r>
           </a:p>
         </p:txBody>
@@ -6605,7 +6605,7 @@
                   <a:srgbClr val="1BB889"/>
                 </a:solidFill>
               </a:rPr>
-              <a:t>🎯  Summary &amp; What's Next</a:t>
+              <a:t>🎯  សង្ខេប &amp; ជំហានបន្ទាប់</a:t>
             </a:r>
           </a:p>
         </p:txBody>
@@ -6639,7 +6639,7 @@
                   <a:srgbClr val="FFFFFF"/>
                 </a:solidFill>
               </a:rPr>
-              <a:t>Week 10 Deliverables</a:t>
+              <a:t>លទ្ធផល Week 10</a:t>
             </a:r>
           </a:p>
         </p:txBody>
@@ -6681,7 +6681,7 @@
                   <a:srgbClr val="FFFFFF"/>
                 </a:solidFill>
               </a:rPr>
-              <a:t>Reports/Models/MonthlyReport.swift — data model</a:t>
+              <a:t>Reports/Models/MonthlyReport.swift — ម៉ូដែលទិន្នន័យ</a:t>
             </a:r>
           </a:p>
           <a:p>
@@ -6700,7 +6700,7 @@
                   <a:srgbClr val="FFFFFF"/>
                 </a:solidFill>
               </a:rPr>
-              <a:t>Reports/ViewModels/ReportViewModel.swift — grouping + P&amp;L</a:t>
+              <a:t>Reports/ViewModels/ReportViewModel.swift — ដាក់ក្រុម + P&amp;L</a:t>
             </a:r>
           </a:p>
           <a:p>
@@ -6719,7 +6719,7 @@
                   <a:srgbClr val="FFFFFF"/>
                 </a:solidFill>
               </a:rPr>
-              <a:t>Reports/Services/CSVExporter.swift — CSV generation + temp file</a:t>
+              <a:t>Reports/Services/CSVExporter.swift — generate CSV + temp file</a:t>
             </a:r>
           </a:p>
           <a:p>
@@ -6738,7 +6738,7 @@
                   <a:srgbClr val="FFFFFF"/>
                 </a:solidFill>
               </a:rPr>
-              <a:t>Reports/Services/PDFGenerator.swift — UIGraphicsPDFRenderer report</a:t>
+              <a:t>Reports/Services/PDFGenerator.swift — របាយការណ៍ UIGraphicsPDFRenderer</a:t>
             </a:r>
           </a:p>
           <a:p>
@@ -6776,7 +6776,7 @@
                   <a:srgbClr val="FFFFFF"/>
                 </a:solidFill>
               </a:rPr>
-              <a:t>Reports/Views/ReportTabView.swift — combined UI + share flow</a:t>
+              <a:t>Reports/Views/ReportTabView.swift — UI + share flow រួមគ្នា</a:t>
             </a:r>
           </a:p>
           <a:p>
@@ -6829,7 +6829,7 @@
                   <a:srgbClr val="FFFFFF"/>
                 </a:solidFill>
               </a:rPr>
-              <a:t>Coming Up — Week 11 / 12</a:t>
+              <a:t>ខាងមុខ — Week 11 / 12</a:t>
             </a:r>
           </a:p>
         </p:txBody>
@@ -6871,7 +6871,7 @@
                   <a:srgbClr val="FFFFFF"/>
                 </a:solidFill>
               </a:rPr>
-              <a:t>CloudKit sync — share farm data across devices</a:t>
+              <a:t>CloudKit sync — ចែករំលែកទិន្នន័យចម្ការ</a:t>
             </a:r>
           </a:p>
           <a:p>
@@ -6890,7 +6890,7 @@
                   <a:srgbClr val="FFFFFF"/>
                 </a:solidFill>
               </a:rPr>
-              <a:t>WidgetKit — farm summary on the Home Screen</a:t>
+              <a:t>WidgetKit — សង្ខេបចម្ការ Home Screen</a:t>
             </a:r>
           </a:p>
           <a:p>
@@ -6909,7 +6909,7 @@
                   <a:srgbClr val="FFFFFF"/>
                 </a:solidFill>
               </a:rPr>
-              <a:t>App Store submission checklist</a:t>
+              <a:t>Checklist ដាក់ App Store</a:t>
             </a:r>
           </a:p>
           <a:p>
@@ -6928,7 +6928,7 @@
                   <a:srgbClr val="FFFFFF"/>
                 </a:solidFill>
               </a:rPr>
-              <a:t>TestFlight internal distribution</a:t>
+              <a:t>TestFlight distribution ខាងក្នុង</a:t>
             </a:r>
           </a:p>
           <a:p>
@@ -6947,7 +6947,7 @@
                   <a:srgbClr val="FFFFFF"/>
                 </a:solidFill>
               </a:rPr>
-              <a:t>Performance profiling with Instruments</a:t>
+              <a:t>Performance profiling ជាមួយ Instruments</a:t>
             </a:r>
           </a:p>
         </p:txBody>
@@ -7024,7 +7024,7 @@
                   <a:srgbClr val="1A1A2E"/>
                 </a:solidFill>
               </a:rPr>
-              <a:t>💡  Key Takeaway</a:t>
+              <a:t>💡  ចំណាំសំខាន់</a:t>
             </a:r>
           </a:p>
         </p:txBody>
@@ -7058,7 +7058,7 @@
                   <a:srgbClr val="1A1A2E"/>
                 </a:solidFill>
               </a:rPr>
-              <a:t>A farmer who can export their own P&amp;L report and share it in WhatsApp trusts the app. CSV + PDF + UIActivityViewController — three tools, one tap, maximum farmer value.</a:t>
+              <a:t>កសិករ​ដែល​អាច​នាំចេញ​​ P&amp;L របស់​ខ្លួន ហើយ​ចែករំលែក​តាម WhatsApp ជឿ​ទុក​ចិត្ត​កម្មវិធី​នេះ។ CSV + PDF + UIActivityViewController — ឧបករណ៍​ 3 tap​​តែ​មួយ​ ​តម្លៃ​ខ្ពស់​បំផុត</a:t>
             </a:r>
           </a:p>
         </p:txBody>
@@ -7195,7 +7195,7 @@
                   <a:srgbClr val="F39620"/>
                 </a:solidFill>
               </a:rPr>
-              <a:t>📋  Agenda — Week 10</a:t>
+              <a:t>📋  របៀបវារៈ — Week 10</a:t>
             </a:r>
           </a:p>
         </p:txBody>
@@ -7306,7 +7306,7 @@
                   <a:srgbClr val="FFFFFF"/>
                 </a:solidFill>
               </a:rPr>
-              <a:t>Custom Bar Charts</a:t>
+              <a:t>Bar Charts ផ្ទាល់ខ្លួន</a:t>
             </a:r>
           </a:p>
         </p:txBody>
@@ -7340,7 +7340,7 @@
                   <a:srgbClr val="AAAABB"/>
                 </a:solidFill>
               </a:rPr>
-              <a:t>GeometryReader + Shape — iOS 13+, zero dependencies</a:t>
+              <a:t>GeometryReader + Shape — iOS 13+, គ្មាន dependencies</a:t>
             </a:r>
           </a:p>
         </p:txBody>
@@ -7485,7 +7485,7 @@
                   <a:srgbClr val="AAAABB"/>
                 </a:solidFill>
               </a:rPr>
-              <a:t>Build comma-separated reports — shareable anywhere</a:t>
+              <a:t>បង្កើតរបាយការណ៍ CSV — ចែករំលែកបានគ្រប់ទីកន្លែង</a:t>
             </a:r>
           </a:p>
         </p:txBody>
@@ -7596,7 +7596,7 @@
                   <a:srgbClr val="FFFFFF"/>
                 </a:solidFill>
               </a:rPr>
-              <a:t>PDFKit Basics</a:t>
+              <a:t>PDFKit មូលដ្ឋាន</a:t>
             </a:r>
           </a:p>
         </p:txBody>
@@ -7741,7 +7741,7 @@
                   <a:srgbClr val="FFFFFF"/>
                 </a:solidFill>
               </a:rPr>
-              <a:t>PDF with Custom Drawing</a:t>
+              <a:t>PDF ជាមួយ Drawing ផ្ទាល់ខ្លួន</a:t>
             </a:r>
           </a:p>
         </p:txBody>
@@ -7775,7 +7775,7 @@
                   <a:srgbClr val="AAAABB"/>
                 </a:solidFill>
               </a:rPr>
-              <a:t>Render text, lines, and bar charts into a PDF page</a:t>
+              <a:t>Render text, lines, bar charts ចូល PDF page</a:t>
             </a:r>
           </a:p>
         </p:txBody>
@@ -8031,7 +8031,7 @@
                   <a:srgbClr val="FFFFFF"/>
                 </a:solidFill>
               </a:rPr>
-              <a:t>End-to-End Report Flow</a:t>
+              <a:t>លំហូររបាយការណ៍ End-to-End</a:t>
             </a:r>
           </a:p>
         </p:txBody>
@@ -8065,7 +8065,7 @@
                   <a:srgbClr val="AAAABB"/>
                 </a:solidFill>
               </a:rPr>
-              <a:t>Generate → Preview → Share in one farmer-friendly tap</a:t>
+              <a:t>Generate → Preview → Share ក្នុង tap តែមួយ</a:t>
             </a:r>
           </a:p>
         </p:txBody>
@@ -8202,7 +8202,7 @@
                   <a:srgbClr val="F39620"/>
                 </a:solidFill>
               </a:rPr>
-              <a:t>📊  Custom Bar Chart — GeometryReader + Shape</a:t>
+              <a:t>📊  Bar Chart ផ្ទាល់ខ្លួន — GeometryReader + Shape</a:t>
             </a:r>
           </a:p>
         </p:txBody>
@@ -8236,7 +8236,7 @@
                   <a:srgbClr val="FFFFFF"/>
                 </a:solidFill>
               </a:rPr>
-              <a:t>Why GeometryReader + Shape instead of Swift Charts?</a:t>
+              <a:t>ហេតុអ្វី GeometryReader + Shape ជំនួស Swift Charts?</a:t>
             </a:r>
           </a:p>
         </p:txBody>
@@ -8278,7 +8278,7 @@
                   <a:srgbClr val="FFFFFF"/>
                 </a:solidFill>
               </a:rPr>
-              <a:t>Swift Charts requires iOS 16+ — our target is iOS 13</a:t>
+              <a:t>Swift Charts ត្រូវការ iOS 16+ — target យើង iOS 13</a:t>
             </a:r>
           </a:p>
           <a:p>
@@ -8297,7 +8297,7 @@
                   <a:srgbClr val="FFFFFF"/>
                 </a:solidFill>
               </a:rPr>
-              <a:t>GeometryReader gives proportional sizing inside any layout</a:t>
+              <a:t>GeometryReader ឱ្យ sizing ដែលសមស្របក្នុង layout ណាមួយ</a:t>
             </a:r>
           </a:p>
           <a:p>
@@ -8316,7 +8316,7 @@
                   <a:srgbClr val="FFFFFF"/>
                 </a:solidFill>
               </a:rPr>
-              <a:t>Shape protocol lets us draw filled rectangles precisely</a:t>
+              <a:t>Shape protocol ឱ្យយើង draw rectangles បានត្រឹមត្រូវ</a:t>
             </a:r>
           </a:p>
           <a:p>
@@ -8335,7 +8335,7 @@
                   <a:srgbClr val="FFFFFF"/>
                 </a:solidFill>
               </a:rPr>
-              <a:t>Full control over colours, spacing, labels, and animations</a:t>
+              <a:t>Control ពេញលេញ colors, spacing, labels, animations</a:t>
             </a:r>
           </a:p>
         </p:txBody>
@@ -8600,7 +8600,7 @@
                   <a:srgbClr val="AAAABB"/>
                 </a:solidFill>
               </a:rPr>
-              <a:t>BarShape draws a bottom-anchored filled rectangle — the fraction scales the height:</a:t>
+              <a:t>BarShape draw rectangle ដែល anchor ខាងក្រោម — fraction scale height:</a:t>
             </a:r>
           </a:p>
         </p:txBody>
@@ -9242,7 +9242,7 @@
                   <a:srgbClr val="F39620"/>
                 </a:solidFill>
               </a:rPr>
-              <a:t>📊  BarChartView — Full Implementation</a:t>
+              <a:t>📊  BarChartView — Implementation ពេញលេញ</a:t>
             </a:r>
           </a:p>
         </p:txBody>
@@ -9705,7 +9705,7 @@
                   <a:srgbClr val="FFFFFF"/>
                 </a:solidFill>
               </a:rPr>
-              <a:t>Design Decisions</a:t>
+              <a:t>ការសម្រេចចិត្ត Design</a:t>
             </a:r>
           </a:p>
         </p:txBody>
@@ -9859,7 +9859,7 @@
                   <a:srgbClr val="AAAABB"/>
                 </a:solidFill>
               </a:rPr>
-              <a:t>Bars scale relative to the largest value — chart always fills the available height</a:t>
+              <a:t>Bars scale ទៅតាមតម្លៃធំបំផុត — chart បំពេញ height ជានិច្ច</a:t>
             </a:r>
           </a:p>
         </p:txBody>
@@ -10013,7 +10013,7 @@
                   <a:srgbClr val="AAAABB"/>
                 </a:solidFill>
               </a:rPr>
-              <a:t>Width adapts to any screen size — no hardcoded pixel values</a:t>
+              <a:t>Width ស្ដាប់ screen size ណាមួយ — គ្មាន pixel values hardcoded</a:t>
             </a:r>
           </a:p>
         </p:txBody>
@@ -10133,7 +10133,7 @@
                   <a:srgbClr val="F39620"/>
                 </a:solidFill>
               </a:rPr>
-              <a:t>Paired bars</a:t>
+              <a:t>Bars គូ</a:t>
             </a:r>
           </a:p>
         </p:txBody>
@@ -10167,7 +10167,7 @@
                   <a:srgbClr val="AAAABB"/>
                 </a:solidFill>
               </a:rPr>
-              <a:t>Income (green) + Expense (red) side by side for instant P&amp;L comparison</a:t>
+              <a:t>ចំណូល (បៃតង) + ចំណាយ (ក្រហម) side by side សម្រាប់ P&amp;L ភ្លាមៗ</a:t>
             </a:r>
           </a:p>
         </p:txBody>
@@ -10287,7 +10287,7 @@
                   <a:srgbClr val="00C9C8"/>
                 </a:solidFill>
               </a:rPr>
-              <a:t>MonthLabel below</a:t>
+              <a:t>MonthLabel ខាងក្រោម</a:t>
             </a:r>
           </a:p>
         </p:txBody>
@@ -10321,7 +10321,7 @@
                   <a:srgbClr val="AAAABB"/>
                 </a:solidFill>
               </a:rPr>
-              <a:t>ខ្មែរ month abbreviations keep the UI compact on small screens</a:t>
+              <a:t>ពាក្យខ្លី month ខ្មែរ ធ្វើ UI compact</a:t>
             </a:r>
           </a:p>
         </p:txBody>
@@ -10458,7 +10458,7 @@
                   <a:srgbClr val="287DFA"/>
                 </a:solidFill>
               </a:rPr>
-              <a:t>📄  CSV Export — Shareable Spreadsheet Data</a:t>
+              <a:t>📄  CSV Export — ទិន្នន័យ Spreadsheet ចែករំលែកបាន</a:t>
             </a:r>
           </a:p>
         </p:txBody>
@@ -10899,7 +10899,7 @@
                   <a:srgbClr val="FFFFFF"/>
                 </a:solidFill>
               </a:rPr>
-              <a:t>CSV Usage</a:t>
+              <a:t>ការប្រើ CSV</a:t>
             </a:r>
           </a:p>
         </p:txBody>
@@ -11065,7 +11065,7 @@
                   <a:srgbClr val="FFFFFF"/>
                 </a:solidFill>
               </a:rPr>
-              <a:t>Key Rules</a:t>
+              <a:t>ច្បាប់សំខាន់</a:t>
             </a:r>
           </a:p>
         </p:txBody>
@@ -11107,7 +11107,7 @@
                   <a:srgbClr val="FFFFFF"/>
                 </a:solidFill>
               </a:rPr>
-              <a:t>Escape commas in text fields (",") → replace with ";"</a:t>
+              <a:t>Escape commas (",") → ជំនួស ";"</a:t>
             </a:r>
           </a:p>
           <a:p>
@@ -11126,7 +11126,7 @@
                   <a:srgbClr val="FFFFFF"/>
                 </a:solidFill>
               </a:rPr>
-              <a:t>Use .temporaryDirectory — no permission needed</a:t>
+              <a:t>ប្រើ .temporaryDirectory — មិនត្រូវការ permission</a:t>
             </a:r>
           </a:p>
           <a:p>
@@ -11145,7 +11145,7 @@
                   <a:srgbClr val="FFFFFF"/>
                 </a:solidFill>
               </a:rPr>
-              <a:t>atomically: true prevents partial writes on crash</a:t>
+              <a:t>atomically: true ការពារ writes មិនពេញ</a:t>
             </a:r>
           </a:p>
           <a:p>
@@ -11164,7 +11164,7 @@
                   <a:srgbClr val="FFFFFF"/>
                 </a:solidFill>
               </a:rPr>
-              <a:t>UTF-8 ensures Khmer text survives the round trip</a:t>
+              <a:t>UTF-8 ធានា text ខ្មែររស់រានជានិច្ច</a:t>
             </a:r>
           </a:p>
           <a:p>
@@ -11183,7 +11183,7 @@
                   <a:srgbClr val="FFFFFF"/>
                 </a:solidFill>
               </a:rPr>
-              <a:t>Open in Excel/Google Sheets on desktop immediately</a:t>
+              <a:t>បើកក្នុង Excel/Google Sheets ភ្លាមៗ</a:t>
             </a:r>
           </a:p>
         </p:txBody>
@@ -11320,7 +11320,7 @@
                   <a:srgbClr val="1BB889"/>
                 </a:solidFill>
               </a:rPr>
-              <a:t>🗒️  PDFKit — Building a PDF Report (iOS 11+)</a:t>
+              <a:t>🗒️  PDFKit — បង្កើតរបាយការណ៍ PDF (iOS 11+)</a:t>
             </a:r>
           </a:p>
         </p:txBody>
@@ -11354,7 +11354,7 @@
                   <a:srgbClr val="FFFFFF"/>
                 </a:solidFill>
               </a:rPr>
-              <a:t>Two ways to create PDFs on iOS:</a:t>
+              <a:t>វិធី ០២ ក្នុងការបង្កើត PDF លើ iOS:</a:t>
             </a:r>
           </a:p>
         </p:txBody>
@@ -11508,7 +11508,7 @@
                   <a:srgbClr val="FFFFFF"/>
                 </a:solidFill>
               </a:rPr>
-              <a:t>• Draw into a CGContext — text, lines, images</a:t>
+              <a:t>• Draw ចូល CGContext — text, lines, images</a:t>
             </a:r>
           </a:p>
         </p:txBody>
@@ -11542,7 +11542,7 @@
                   <a:srgbClr val="FFFFFF"/>
                 </a:solidFill>
               </a:rPr>
-              <a:t>• Works on iOS 10+ — no PDFKit import needed</a:t>
+              <a:t>• ដំណើរការ iOS 10+ — មិនត្រូវ import PDFKit</a:t>
             </a:r>
           </a:p>
         </p:txBody>
@@ -11576,7 +11576,7 @@
                   <a:srgbClr val="FFFFFF"/>
                 </a:solidFill>
               </a:rPr>
-              <a:t>• Best for custom-designed report pages</a:t>
+              <a:t>• ល្អបំផុតសម្រាប់ report pages custom</a:t>
             </a:r>
           </a:p>
         </p:txBody>
@@ -11730,7 +11730,7 @@
                   <a:srgbClr val="FFFFFF"/>
                 </a:solidFill>
               </a:rPr>
-              <a:t>• Compose pages from UIView snapshots</a:t>
+              <a:t>• ផ្សំ pages ពី UIView snapshots</a:t>
             </a:r>
           </a:p>
         </p:txBody>
@@ -11764,7 +11764,7 @@
                   <a:srgbClr val="FFFFFF"/>
                 </a:solidFill>
               </a:rPr>
-              <a:t>• Better for existing SwiftUI views → PDF</a:t>
+              <a:t>• ល្អជាង SwiftUI views → PDF</a:t>
             </a:r>
           </a:p>
         </p:txBody>
@@ -11798,7 +11798,7 @@
                   <a:srgbClr val="FFFFFF"/>
                 </a:solidFill>
               </a:rPr>
-              <a:t>• Requires PDFKit (iOS 11+) import</a:t>
+              <a:t>• ត្រូវការ PDFKit (iOS 11+) import</a:t>
             </a:r>
           </a:p>
         </p:txBody>
@@ -12255,7 +12255,7 @@
                   <a:srgbClr val="00C9C8"/>
                 </a:solidFill>
               </a:rPr>
-              <a:t>🖊️  Drawing Text &amp; Tables into a PDF Page</a:t>
+              <a:t>🖊️  Draw Text &amp; Tables ក្នុង PDF Page</a:t>
             </a:r>
           </a:p>
         </p:txBody>
@@ -12696,7 +12696,7 @@
                   <a:srgbClr val="FFFFFF"/>
                 </a:solidFill>
               </a:rPr>
-              <a:t>Output Preview</a:t>
+              <a:t>Preview លទ្ធផល</a:t>
             </a:r>
           </a:p>
         </p:txBody>
@@ -12773,7 +12773,7 @@
                   <a:srgbClr val="1A1A2E"/>
                 </a:solidFill>
               </a:rPr>
-              <a:t>Farm Monthly Report</a:t>
+              <a:t>របាយការណ៍ប្រចាំខែ ចម្ការ</a:t>
             </a:r>
           </a:p>
         </p:txBody>
@@ -13508,7 +13508,7 @@
                   <a:srgbClr val="8E44AD"/>
                 </a:solidFill>
               </a:rPr>
-              <a:t>📤  UIActivityViewController — Sharing Reports</a:t>
+              <a:t>📤  UIActivityViewController — ចែករំលែករបាយការណ៍</a:t>
             </a:r>
           </a:p>
         </p:txBody>
@@ -13894,7 +13894,7 @@
                   <a:srgbClr val="FFFFFF"/>
                 </a:solidFill>
               </a:rPr>
-              <a:t>What Farmers See</a:t>
+              <a:t>អ្វីដែលកសិករឃើញ</a:t>
             </a:r>
           </a:p>
         </p:txBody>
@@ -13936,7 +13936,7 @@
                   <a:srgbClr val="FFFFFF"/>
                 </a:solidFill>
               </a:rPr>
-              <a:t>Share sheet slides up automatically</a:t>
+              <a:t>Share sheet លេចចេញស្វ័យប្រវត្តិ</a:t>
             </a:r>
           </a:p>
           <a:p>
@@ -13955,7 +13955,7 @@
                   <a:srgbClr val="FFFFFF"/>
                 </a:solidFill>
               </a:rPr>
-              <a:t>AirDrop → send to laptop instantly</a:t>
+              <a:t>AirDrop → ផ្ញើទៅ laptop ភ្លាមៗ</a:t>
             </a:r>
           </a:p>
           <a:p>
@@ -13974,7 +13974,7 @@
                   <a:srgbClr val="FFFFFF"/>
                 </a:solidFill>
               </a:rPr>
-              <a:t>Mail → attach to email for agronomist</a:t>
+              <a:t>Mail → attach ក្នុង email</a:t>
             </a:r>
           </a:p>
           <a:p>
@@ -13993,7 +13993,7 @@
                   <a:srgbClr val="FFFFFF"/>
                 </a:solidFill>
               </a:rPr>
-              <a:t>Files app → save to iCloud / local</a:t>
+              <a:t>Files app → save ទៅ iCloud / local</a:t>
             </a:r>
           </a:p>
           <a:p>
@@ -14012,7 +14012,7 @@
                   <a:srgbClr val="FFFFFF"/>
                 </a:solidFill>
               </a:rPr>
-              <a:t>WhatsApp / Telegram (if installed)</a:t>
+              <a:t>WhatsApp / Telegram (បើ install ហើយ)</a:t>
             </a:r>
           </a:p>
           <a:p>
@@ -14031,7 +14031,7 @@
                   <a:srgbClr val="FFFFFF"/>
                 </a:solidFill>
               </a:rPr>
-              <a:t>Print → AirPrint-enabled printers</a:t>
+              <a:t>Print → printers AirPrint</a:t>
             </a:r>
           </a:p>
         </p:txBody>
@@ -14389,7 +14389,7 @@
                   <a:srgbClr val="FFD700"/>
                 </a:solidFill>
               </a:rPr>
-              <a:t>🌾  ReportTabView — End-to-End Farmer Flow</a:t>
+              <a:t>🌾  ReportTabView — លំហូរ End-to-End កសិករ</a:t>
             </a:r>
           </a:p>
         </p:txBody>
@@ -14907,7 +14907,7 @@
                   <a:srgbClr val="FFFFFF"/>
                 </a:solidFill>
               </a:rPr>
-              <a:t>Flow</a:t>
+              <a:t>លំហូរ</a:t>
             </a:r>
           </a:p>
         </p:txBody>
@@ -15027,7 +15027,7 @@
                   <a:srgbClr val="F39620"/>
                 </a:solidFill>
               </a:rPr>
-              <a:t>1. Select Month</a:t>
+              <a:t>1. ជ្រើសខែ</a:t>
             </a:r>
           </a:p>
         </p:txBody>
@@ -15061,7 +15061,7 @@
                   <a:srgbClr val="AAAABB"/>
                 </a:solidFill>
               </a:rPr>
-              <a:t>MonthPickerView ‹/› → vm.selectedMonth → SummaryCardView updates</a:t>
+              <a:t>MonthPickerView ‹/› → vm.selectedMonth → SummaryCardView ធ្វើបច្ចុប្បន្នភាព</a:t>
             </a:r>
           </a:p>
         </p:txBody>
@@ -15181,7 +15181,7 @@
                   <a:srgbClr val="287DFA"/>
                 </a:solidFill>
               </a:rPr>
-              <a:t>2. View Chart</a:t>
+              <a:t>2. មើល Chart</a:t>
             </a:r>
           </a:p>
         </p:txBody>
@@ -15215,7 +15215,7 @@
                   <a:srgbClr val="AAAABB"/>
                 </a:solidFill>
               </a:rPr>
-              <a:t>BarChartView shows suffix(6) months; empty state if no transactions</a:t>
+              <a:t>BarChartView បង្ហាញ ៦ ខែ; empty state បើគ្មាន transactions</a:t>
             </a:r>
           </a:p>
         </p:txBody>
@@ -15335,7 +15335,7 @@
                   <a:srgbClr val="1BB889"/>
                 </a:solidFill>
               </a:rPr>
-              <a:t>3. Tap CSV / PDF</a:t>
+              <a:t>3. ចុច CSV / PDF</a:t>
             </a:r>
           </a:p>
         </p:txBody>
@@ -15369,7 +15369,7 @@
                   <a:srgbClr val="AAAABB"/>
                 </a:solidFill>
               </a:rPr>
-              <a:t>PrimaryButton triggers exportCSV() / exportPDF() — background thread</a:t>
+              <a:t>PrimaryButton ដំណើរការ exportCSV() / exportPDF()</a:t>
             </a:r>
           </a:p>
         </p:txBody>
@@ -15677,7 +15677,7 @@
                   <a:srgbClr val="AAAABB"/>
                 </a:solidFill>
               </a:rPr>
-              <a:t>ShareSheet(items: [url]) wraps UIActivityViewController</a:t>
+              <a:t>ShareSheet(items: [url]) រំកិល UIActivityViewController</a:t>
             </a:r>
           </a:p>
         </p:txBody>
@@ -15797,7 +15797,7 @@
                   <a:srgbClr val="FFD700"/>
                 </a:solidFill>
               </a:rPr>
-              <a:t>6. Farmer Shares</a:t>
+              <a:t>6. កសិករចែករំលែក</a:t>
             </a:r>
           </a:p>
         </p:txBody>
